--- a/docs/pdf/M211_렌더팜_설명회.pptx
+++ b/docs/pdf/M211_렌더팜_설명회.pptx
@@ -135,20 +135,20 @@
   <p:extLst>
     <p:ext uri="{521415D9-36F7-43E2-AB2F-B90AF26B5E84}">
       <p14:sectionLst xmlns:p14="http://schemas.microsoft.com/office/powerpoint/2010/main">
-        <p14:section name="여는 말" id="{48c4bef8-bd90-6be0-41d2-fb53fca32871}">
+        <p14:section name="여는 말" id="{2bd30c2e-203b-f143-03c8-4a7f55e29f36}">
           <p14:sldIdLst>
             <p14:sldId id="256"/>
             <p14:sldId id="257"/>
           </p14:sldIdLst>
         </p14:section>
-        <p14:section name="렌더팜이란" id="{c2aa868b-96bc-0ae8-8ae2-e5c895d0941d}">
+        <p14:section name="렌더팜이란" id="{46d9fbe9-2fbb-ca2b-f29a-999f1d921fcc}">
           <p14:sldIdLst>
             <p14:sldId id="258"/>
             <p14:sldId id="259"/>
             <p14:sldId id="260"/>
           </p14:sldIdLst>
         </p14:section>
-        <p14:section name="예약 규칙" id="{2dcaa9e1-f03a-c357-dfda-0cbec70d51e5}">
+        <p14:section name="예약 규칙" id="{becbb400-6a09-3800-bce5-d875274e1230}">
           <p14:sldIdLst>
             <p14:sldId id="261"/>
             <p14:sldId id="262"/>
@@ -157,7 +157,7 @@
             <p14:sldId id="265"/>
           </p14:sldIdLst>
         </p14:section>
-        <p14:section name="사용법" id="{6990bc36-9333-55c8-9b2a-3ba2ba9bfb17}">
+        <p14:section name="사용법" id="{08b578c3-184f-0e7a-d5fa-6a43b1c3a2d6}">
           <p14:sldIdLst>
             <p14:sldId id="266"/>
             <p14:sldId id="267"/>
@@ -172,14 +172,14 @@
             <p14:sldId id="276"/>
           </p14:sldIdLst>
         </p14:section>
-        <p14:section name="시연" id="{b68951df-d3b6-f0cd-1967-f444a5699154}">
+        <p14:section name="시연" id="{9b0b34e4-30c7-aaef-edf0-c3224f399283}">
           <p14:sldIdLst>
             <p14:sldId id="277"/>
             <p14:sldId id="278"/>
             <p14:sldId id="279"/>
           </p14:sldIdLst>
         </p14:section>
-        <p14:section name="자주 나는 실수" id="{c5a696c4-e962-dd17-115f-5fe343fb9e20}">
+        <p14:section name="자주 나는 실수" id="{a70a2ed3-5d94-2a1e-6bd4-50a69d814444}">
           <p14:sldIdLst>
             <p14:sldId id="280"/>
             <p14:sldId id="281"/>
@@ -1032,8 +1032,8 @@
           <a:p>
             <a:r>
               <a:rPr lang="en-US" dirty="0"/>
-              <a:t>실물 화면을 띄워 칸을 비우는 동작을 한 번 보여주세요. 그 다음 File name: 줄을 손가락으로 짚습니다. 경로 사고가 제일 자주 날 지점입니다.
-AOV 질문이 나오면: beauty, ID, background 같은 폴더가 여러 개 생기는 건 정상이고 씬에 패스를 켜둬서 그렇다, beauty가 최종 이미지다, 끌 필요 없다 — 이렇게 답하세요.</a:t>
+              <a:t>「폴더는 제출 창, 파일 이름은 씬」 이 한 문장만 가져가게 하세요. 실물 화면에서 File name: 줄을 손가락으로 짚어주시면 좋습니다.
+AOV 질문이 나오면 beauty, ID, background 같은 폴더가 여러 개 생기는 건 정상이고 beauty 가 최종 이미지라고 답하세요.</a:t>
             </a:r>
             <a:endParaRPr lang="en-US" dirty="0"/>
           </a:p>
@@ -5686,7 +5686,7 @@
                   <a:schemeClr val="tx1"/>
                 </a:solidFill>
               </a:rPr>
-              <a:t>File name prefix 에 내 학번 output 경로</a:t>
+              <a:t>File name prefix 에 파일 이름만</a:t>
             </a:r>
             <a:endParaRPr lang="en-US" sz="1700" dirty="0"/>
           </a:p>
@@ -5866,7 +5866,7 @@
                   <a:schemeClr val="tx1"/>
                 </a:solidFill>
               </a:rPr>
-              <a:t>출력 경로를 안 적으면 output 폴더가 빕니다</a:t>
+              <a:t>폴더는 제출 창이, 파일 이름은 씬이 정합니다</a:t>
             </a:r>
             <a:endParaRPr lang="en-US" sz="3100" dirty="0"/>
           </a:p>
@@ -5902,7 +5902,7 @@
                   <a:schemeClr val="tx2"/>
                 </a:solidFill>
               </a:rPr>
-              <a:t>제출 창에는 저장 위치를 정하는 칸이 없습니다. 씬에 적힌 경로가 곧 저장 위치입니다.</a:t>
+              <a:t>결과물이 어디 저장될지는 두 칸이 나눠서 정합니다. 양쪽에 다 전체 경로를 넣으면 경로가 이어 붙습니다.</a:t>
             </a:r>
             <a:endParaRPr lang="en-US" sz="1700" dirty="0"/>
           </a:p>
@@ -5917,11 +5917,11 @@
         <p:spPr>
           <a:xfrm>
             <a:off x="685800" y="1828800"/>
-            <a:ext cx="5212080" cy="1645920"/>
+            <a:ext cx="5212080" cy="2103120"/>
           </a:xfrm>
           <a:prstGeom prst="roundRect">
             <a:avLst>
-              <a:gd name="adj" fmla="val 5556"/>
+              <a:gd name="adj" fmla="val 4348"/>
             </a:avLst>
           </a:prstGeom>
           <a:solidFill>
@@ -5960,87 +5960,51 @@
               <a:buNone/>
             </a:pPr>
             <a:r>
-              <a:rPr lang="en-US" sz="1900" b="1" dirty="0">
-                <a:solidFill>
-                  <a:schemeClr val="accent3"/>
-                </a:solidFill>
-              </a:rPr>
-              <a:t>비워두면</a:t>
-            </a:r>
-            <a:endParaRPr lang="en-US" sz="1900" dirty="0"/>
-          </a:p>
-        </p:txBody>
-      </p:sp>
-      <p:sp>
-        <p:nvSpPr>
-          <p:cNvPr id="6" name="Text 4"/>
-          <p:cNvSpPr txBox="1"/>
-          <p:nvPr/>
-        </p:nvSpPr>
-        <p:spPr>
-          <a:xfrm>
-            <a:off x="1051560" y="2377440"/>
-            <a:ext cx="4480560" cy="320040"/>
-          </a:xfrm>
-          <a:prstGeom prst="rect">
-            <a:avLst/>
-          </a:prstGeom>
-          <a:noFill/>
-          <a:ln/>
-        </p:spPr>
-        <p:txBody>
-          <a:bodyPr wrap="square" rtlCol="0" anchor="ctr"/>
-          <a:lstStyle/>
-          <a:p>
-            <a:pPr indent="0" marL="0">
-              <a:buNone/>
-            </a:pPr>
-            <a:r>
-              <a:rPr lang="en-US" sz="1500" dirty="0">
-                <a:solidFill>
-                  <a:schemeClr val="tx2"/>
-                </a:solidFill>
-              </a:rPr>
-              <a:t>렌더는 성공</a:t>
-            </a:r>
-            <a:endParaRPr lang="en-US" sz="1500" dirty="0"/>
-          </a:p>
-        </p:txBody>
-      </p:sp>
-      <p:sp>
-        <p:nvSpPr>
-          <p:cNvPr id="7" name="Text 5"/>
-          <p:cNvSpPr txBox="1"/>
-          <p:nvPr/>
-        </p:nvSpPr>
-        <p:spPr>
-          <a:xfrm>
-            <a:off x="1051560" y="2724912"/>
-            <a:ext cx="4480560" cy="640080"/>
-          </a:xfrm>
-          <a:prstGeom prst="rect">
-            <a:avLst/>
-          </a:prstGeom>
-          <a:noFill/>
-          <a:ln/>
-        </p:spPr>
-        <p:txBody>
-          <a:bodyPr wrap="square" rtlCol="0" anchor="ctr"/>
-          <a:lstStyle/>
-          <a:p>
-            <a:pPr indent="0" marL="0">
-              <a:buNone/>
-            </a:pPr>
-            <a:r>
-              <a:rPr lang="en-US" sz="1400" b="1" dirty="0">
-                <a:solidFill>
-                  <a:schemeClr val="tx1"/>
+              <a:rPr lang="en-US" sz="2000" b="1" dirty="0">
+                <a:solidFill>
+                  <a:schemeClr val="accent2"/>
                 </a:solidFill>
                 <a:latin typeface="Courier New" pitchFamily="34" charset="0"/>
                 <a:ea typeface="Courier New" pitchFamily="34" charset="-122"/>
                 <a:cs typeface="Courier New" pitchFamily="34" charset="-120"/>
               </a:rPr>
-              <a:t>input\...\프로젝트\images\ 에 생깁니다</a:t>
+              <a:t>Output Path</a:t>
+            </a:r>
+            <a:endParaRPr lang="en-US" sz="2000" dirty="0"/>
+          </a:p>
+        </p:txBody>
+      </p:sp>
+      <p:sp>
+        <p:nvSpPr>
+          <p:cNvPr id="6" name="Text 4"/>
+          <p:cNvSpPr txBox="1"/>
+          <p:nvPr/>
+        </p:nvSpPr>
+        <p:spPr>
+          <a:xfrm>
+            <a:off x="1051560" y="2377440"/>
+            <a:ext cx="4480560" cy="320040"/>
+          </a:xfrm>
+          <a:prstGeom prst="rect">
+            <a:avLst/>
+          </a:prstGeom>
+          <a:noFill/>
+          <a:ln/>
+        </p:spPr>
+        <p:txBody>
+          <a:bodyPr wrap="square" rtlCol="0" anchor="ctr"/>
+          <a:lstStyle/>
+          <a:p>
+            <a:pPr indent="0" marL="0">
+              <a:buNone/>
+            </a:pPr>
+            <a:r>
+              <a:rPr lang="en-US" sz="1400" dirty="0">
+                <a:solidFill>
+                  <a:schemeClr val="tx2"/>
+                </a:solidFill>
+              </a:rPr>
+              <a:t>제출 창</a:t>
             </a:r>
             <a:endParaRPr lang="en-US" sz="1400" dirty="0"/>
           </a:p>
@@ -6048,18 +6012,93 @@
       </p:sp>
       <p:sp>
         <p:nvSpPr>
-          <p:cNvPr id="8" name="out1"/>
+          <p:cNvPr id="7" name="Text 5"/>
+          <p:cNvSpPr txBox="1"/>
+          <p:nvPr/>
+        </p:nvSpPr>
+        <p:spPr>
+          <a:xfrm>
+            <a:off x="1051560" y="2743200"/>
+            <a:ext cx="4480560" cy="384048"/>
+          </a:xfrm>
+          <a:prstGeom prst="rect">
+            <a:avLst/>
+          </a:prstGeom>
+          <a:noFill/>
+          <a:ln/>
+        </p:spPr>
+        <p:txBody>
+          <a:bodyPr wrap="square" rtlCol="0" anchor="ctr"/>
+          <a:lstStyle/>
+          <a:p>
+            <a:pPr indent="0" marL="0">
+              <a:buNone/>
+            </a:pPr>
+            <a:r>
+              <a:rPr lang="en-US" sz="1900" b="1" dirty="0">
+                <a:solidFill>
+                  <a:schemeClr val="tx1"/>
+                </a:solidFill>
+              </a:rPr>
+              <a:t>폴더 경로</a:t>
+            </a:r>
+            <a:endParaRPr lang="en-US" sz="1900" dirty="0"/>
+          </a:p>
+        </p:txBody>
+      </p:sp>
+      <p:sp>
+        <p:nvSpPr>
+          <p:cNvPr id="8" name="Text 6"/>
+          <p:cNvSpPr txBox="1"/>
+          <p:nvPr/>
+        </p:nvSpPr>
+        <p:spPr>
+          <a:xfrm>
+            <a:off x="1051560" y="3200400"/>
+            <a:ext cx="4480560" cy="548640"/>
+          </a:xfrm>
+          <a:prstGeom prst="rect">
+            <a:avLst/>
+          </a:prstGeom>
+          <a:noFill/>
+          <a:ln/>
+        </p:spPr>
+        <p:txBody>
+          <a:bodyPr wrap="square" rtlCol="0" anchor="ctr"/>
+          <a:lstStyle/>
+          <a:p>
+            <a:pPr indent="0" marL="0">
+              <a:buNone/>
+            </a:pPr>
+            <a:r>
+              <a:rPr lang="en-US" sz="1200" dirty="0">
+                <a:solidFill>
+                  <a:schemeClr val="tx2"/>
+                </a:solidFill>
+                <a:latin typeface="Courier New" pitchFamily="34" charset="0"/>
+                <a:ea typeface="Courier New" pitchFamily="34" charset="-122"/>
+                <a:cs typeface="Courier New" pitchFamily="34" charset="-120"/>
+              </a:rPr>
+              <a:t>//223.194.101.83/.../output/내학번/날짜_작업명</a:t>
+            </a:r>
+            <a:endParaRPr lang="en-US" sz="1200" dirty="0"/>
+          </a:p>
+        </p:txBody>
+      </p:sp>
+      <p:sp>
+        <p:nvSpPr>
+          <p:cNvPr id="9" name="out1"/>
           <p:cNvSpPr/>
           <p:nvPr/>
         </p:nvSpPr>
         <p:spPr>
           <a:xfrm>
             <a:off x="6263640" y="1828800"/>
-            <a:ext cx="5212080" cy="1645920"/>
+            <a:ext cx="5212080" cy="2103120"/>
           </a:xfrm>
           <a:prstGeom prst="roundRect">
             <a:avLst>
-              <a:gd name="adj" fmla="val 5556"/>
+              <a:gd name="adj" fmla="val 4348"/>
             </a:avLst>
           </a:prstGeom>
           <a:solidFill>
@@ -6075,7 +6114,7 @@
       </p:sp>
       <p:sp>
         <p:nvSpPr>
-          <p:cNvPr id="9" name="Text 7"/>
+          <p:cNvPr id="10" name="Text 8"/>
           <p:cNvSpPr txBox="1"/>
           <p:nvPr/>
         </p:nvSpPr>
@@ -6098,87 +6137,51 @@
               <a:buNone/>
             </a:pPr>
             <a:r>
-              <a:rPr lang="en-US" sz="1900" b="1" dirty="0">
+              <a:rPr lang="en-US" sz="2000" b="1" dirty="0">
                 <a:solidFill>
                   <a:schemeClr val="accent4"/>
-                </a:solidFill>
-              </a:rPr>
-              <a:t>경로를 적으면</a:t>
-            </a:r>
-            <a:endParaRPr lang="en-US" sz="1900" dirty="0"/>
-          </a:p>
-        </p:txBody>
-      </p:sp>
-      <p:sp>
-        <p:nvSpPr>
-          <p:cNvPr id="10" name="Text 8"/>
-          <p:cNvSpPr txBox="1"/>
-          <p:nvPr/>
-        </p:nvSpPr>
-        <p:spPr>
-          <a:xfrm>
-            <a:off x="6629400" y="2377440"/>
-            <a:ext cx="4480560" cy="320040"/>
-          </a:xfrm>
-          <a:prstGeom prst="rect">
-            <a:avLst/>
-          </a:prstGeom>
-          <a:noFill/>
-          <a:ln/>
-        </p:spPr>
-        <p:txBody>
-          <a:bodyPr wrap="square" rtlCol="0" anchor="ctr"/>
-          <a:lstStyle/>
-          <a:p>
-            <a:pPr indent="0" marL="0">
-              <a:buNone/>
-            </a:pPr>
-            <a:r>
-              <a:rPr lang="en-US" sz="1500" dirty="0">
-                <a:solidFill>
-                  <a:schemeClr val="tx2"/>
-                </a:solidFill>
-              </a:rPr>
-              <a:t>렌더는 성공</a:t>
-            </a:r>
-            <a:endParaRPr lang="en-US" sz="1500" dirty="0"/>
-          </a:p>
-        </p:txBody>
-      </p:sp>
-      <p:sp>
-        <p:nvSpPr>
-          <p:cNvPr id="11" name="Text 9"/>
-          <p:cNvSpPr txBox="1"/>
-          <p:nvPr/>
-        </p:nvSpPr>
-        <p:spPr>
-          <a:xfrm>
-            <a:off x="6629400" y="2724912"/>
-            <a:ext cx="4480560" cy="640080"/>
-          </a:xfrm>
-          <a:prstGeom prst="rect">
-            <a:avLst/>
-          </a:prstGeom>
-          <a:noFill/>
-          <a:ln/>
-        </p:spPr>
-        <p:txBody>
-          <a:bodyPr wrap="square" rtlCol="0" anchor="ctr"/>
-          <a:lstStyle/>
-          <a:p>
-            <a:pPr indent="0" marL="0">
-              <a:buNone/>
-            </a:pPr>
-            <a:r>
-              <a:rPr lang="en-US" sz="1400" b="1" dirty="0">
-                <a:solidFill>
-                  <a:schemeClr val="tx1"/>
                 </a:solidFill>
                 <a:latin typeface="Courier New" pitchFamily="34" charset="0"/>
                 <a:ea typeface="Courier New" pitchFamily="34" charset="-122"/>
                 <a:cs typeface="Courier New" pitchFamily="34" charset="-120"/>
               </a:rPr>
-              <a:t>output\내학번\날짜_작업명\ 에 생깁니다</a:t>
+              <a:t>File name prefix</a:t>
+            </a:r>
+            <a:endParaRPr lang="en-US" sz="2000" dirty="0"/>
+          </a:p>
+        </p:txBody>
+      </p:sp>
+      <p:sp>
+        <p:nvSpPr>
+          <p:cNvPr id="11" name="Text 9"/>
+          <p:cNvSpPr txBox="1"/>
+          <p:nvPr/>
+        </p:nvSpPr>
+        <p:spPr>
+          <a:xfrm>
+            <a:off x="6629400" y="2377440"/>
+            <a:ext cx="4480560" cy="320040"/>
+          </a:xfrm>
+          <a:prstGeom prst="rect">
+            <a:avLst/>
+          </a:prstGeom>
+          <a:noFill/>
+          <a:ln/>
+        </p:spPr>
+        <p:txBody>
+          <a:bodyPr wrap="square" rtlCol="0" anchor="ctr"/>
+          <a:lstStyle/>
+          <a:p>
+            <a:pPr indent="0" marL="0">
+              <a:buNone/>
+            </a:pPr>
+            <a:r>
+              <a:rPr lang="en-US" sz="1400" dirty="0">
+                <a:solidFill>
+                  <a:schemeClr val="tx2"/>
+                </a:solidFill>
+              </a:rPr>
+              <a:t>Render Settings → Common</a:t>
             </a:r>
             <a:endParaRPr lang="en-US" sz="1400" dirty="0"/>
           </a:p>
@@ -6186,18 +6189,93 @@
       </p:sp>
       <p:sp>
         <p:nvSpPr>
-          <p:cNvPr id="12" name="path"/>
+          <p:cNvPr id="12" name="Text 10"/>
+          <p:cNvSpPr txBox="1"/>
+          <p:nvPr/>
+        </p:nvSpPr>
+        <p:spPr>
+          <a:xfrm>
+            <a:off x="6629400" y="2743200"/>
+            <a:ext cx="4480560" cy="384048"/>
+          </a:xfrm>
+          <a:prstGeom prst="rect">
+            <a:avLst/>
+          </a:prstGeom>
+          <a:noFill/>
+          <a:ln/>
+        </p:spPr>
+        <p:txBody>
+          <a:bodyPr wrap="square" rtlCol="0" anchor="ctr"/>
+          <a:lstStyle/>
+          <a:p>
+            <a:pPr indent="0" marL="0">
+              <a:buNone/>
+            </a:pPr>
+            <a:r>
+              <a:rPr lang="en-US" sz="1900" b="1" dirty="0">
+                <a:solidFill>
+                  <a:schemeClr val="tx1"/>
+                </a:solidFill>
+              </a:rPr>
+              <a:t>파일 이름만</a:t>
+            </a:r>
+            <a:endParaRPr lang="en-US" sz="1900" dirty="0"/>
+          </a:p>
+        </p:txBody>
+      </p:sp>
+      <p:sp>
+        <p:nvSpPr>
+          <p:cNvPr id="13" name="Text 11"/>
+          <p:cNvSpPr txBox="1"/>
+          <p:nvPr/>
+        </p:nvSpPr>
+        <p:spPr>
+          <a:xfrm>
+            <a:off x="6629400" y="3200400"/>
+            <a:ext cx="4480560" cy="548640"/>
+          </a:xfrm>
+          <a:prstGeom prst="rect">
+            <a:avLst/>
+          </a:prstGeom>
+          <a:noFill/>
+          <a:ln/>
+        </p:spPr>
+        <p:txBody>
+          <a:bodyPr wrap="square" rtlCol="0" anchor="ctr"/>
+          <a:lstStyle/>
+          <a:p>
+            <a:pPr indent="0" marL="0">
+              <a:buNone/>
+            </a:pPr>
+            <a:r>
+              <a:rPr lang="en-US" sz="1200" dirty="0">
+                <a:solidFill>
+                  <a:schemeClr val="tx2"/>
+                </a:solidFill>
+                <a:latin typeface="Courier New" pitchFamily="34" charset="0"/>
+                <a:ea typeface="Courier New" pitchFamily="34" charset="-122"/>
+                <a:cs typeface="Courier New" pitchFamily="34" charset="-120"/>
+              </a:rPr>
+              <a:t>shot01</a:t>
+            </a:r>
+            <a:endParaRPr lang="en-US" sz="1200" dirty="0"/>
+          </a:p>
+        </p:txBody>
+      </p:sp>
+      <p:sp>
+        <p:nvSpPr>
+          <p:cNvPr id="14" name="chk"/>
           <p:cNvSpPr/>
           <p:nvPr/>
         </p:nvSpPr>
         <p:spPr>
           <a:xfrm>
-            <a:off x="685800" y="3657600"/>
-            <a:ext cx="10789920" cy="1051560"/>
+            <a:off x="685800" y="4160520"/>
+            <a:ext cx="10789920" cy="1097280"/>
           </a:xfrm>
           <a:prstGeom prst="roundRect">
             <a:avLst>
-              <a:gd name="adj" fmla="val 8696"/>
+              <a:gd name="adj" fmla="val 8333"/>
             </a:avLst>
           </a:prstGeom>
           <a:solidFill>
@@ -6213,96 +6291,93 @@
       </p:sp>
       <p:sp>
         <p:nvSpPr>
-          <p:cNvPr id="13" name="Text 11"/>
-          <p:cNvSpPr txBox="1"/>
-          <p:nvPr/>
-        </p:nvSpPr>
-        <p:spPr>
-          <a:xfrm>
-            <a:off x="1143000" y="3767328"/>
-            <a:ext cx="10058400" cy="347472"/>
-          </a:xfrm>
-          <a:prstGeom prst="rect">
-            <a:avLst/>
-          </a:prstGeom>
-          <a:noFill/>
-          <a:ln/>
-        </p:spPr>
-        <p:txBody>
-          <a:bodyPr wrap="square" rtlCol="0" anchor="ctr"/>
-          <a:lstStyle/>
-          <a:p>
-            <a:pPr indent="0" marL="0">
-              <a:buNone/>
-            </a:pPr>
-            <a:r>
-              <a:rPr lang="en-US" sz="1400" dirty="0">
-                <a:solidFill>
-                  <a:schemeClr val="accent2"/>
+          <p:cNvPr id="15" name="Text 13"/>
+          <p:cNvSpPr txBox="1"/>
+          <p:nvPr/>
+        </p:nvSpPr>
+        <p:spPr>
+          <a:xfrm>
+            <a:off x="1143000" y="4251960"/>
+            <a:ext cx="10058400" cy="365760"/>
+          </a:xfrm>
+          <a:prstGeom prst="rect">
+            <a:avLst/>
+          </a:prstGeom>
+          <a:noFill/>
+          <a:ln/>
+        </p:spPr>
+        <p:txBody>
+          <a:bodyPr wrap="square" rtlCol="0" anchor="ctr"/>
+          <a:lstStyle/>
+          <a:p>
+            <a:pPr indent="0" marL="0">
+              <a:buNone/>
+            </a:pPr>
+            <a:r>
+              <a:rPr lang="en-US" sz="1600" b="1" dirty="0">
+                <a:solidFill>
+                  <a:schemeClr val="tx1"/>
+                </a:solidFill>
+              </a:rPr>
+              <a:t>확인 — File name: 줄에 경로가 안 보이면 맞습니다</a:t>
+            </a:r>
+            <a:endParaRPr lang="en-US" sz="1600" dirty="0"/>
+          </a:p>
+        </p:txBody>
+      </p:sp>
+      <p:sp>
+        <p:nvSpPr>
+          <p:cNvPr id="16" name="Text 14"/>
+          <p:cNvSpPr txBox="1"/>
+          <p:nvPr/>
+        </p:nvSpPr>
+        <p:spPr>
+          <a:xfrm>
+            <a:off x="1143000" y="4645152"/>
+            <a:ext cx="10058400" cy="457200"/>
+          </a:xfrm>
+          <a:prstGeom prst="rect">
+            <a:avLst/>
+          </a:prstGeom>
+          <a:noFill/>
+          <a:ln/>
+        </p:spPr>
+        <p:txBody>
+          <a:bodyPr wrap="square" rtlCol="0" anchor="ctr"/>
+          <a:lstStyle/>
+          <a:p>
+            <a:pPr indent="0" marL="0">
+              <a:buNone/>
+            </a:pPr>
+            <a:r>
+              <a:rPr lang="en-US" sz="1500" dirty="0">
+                <a:solidFill>
+                  <a:schemeClr val="tx1"/>
                 </a:solidFill>
                 <a:latin typeface="Courier New" pitchFamily="34" charset="0"/>
                 <a:ea typeface="Courier New" pitchFamily="34" charset="-122"/>
                 <a:cs typeface="Courier New" pitchFamily="34" charset="-120"/>
               </a:rPr>
-              <a:t>Render Settings → Common → File name prefix</a:t>
-            </a:r>
-            <a:endParaRPr lang="en-US" sz="1400" dirty="0"/>
-          </a:p>
-        </p:txBody>
-      </p:sp>
-      <p:sp>
-        <p:nvSpPr>
-          <p:cNvPr id="14" name="Text 12"/>
-          <p:cNvSpPr txBox="1"/>
-          <p:nvPr/>
-        </p:nvSpPr>
-        <p:spPr>
-          <a:xfrm>
-            <a:off x="1143000" y="4133088"/>
-            <a:ext cx="10058400" cy="457200"/>
-          </a:xfrm>
-          <a:prstGeom prst="rect">
-            <a:avLst/>
-          </a:prstGeom>
-          <a:noFill/>
-          <a:ln/>
-        </p:spPr>
-        <p:txBody>
-          <a:bodyPr wrap="square" rtlCol="0" anchor="ctr"/>
-          <a:lstStyle/>
-          <a:p>
-            <a:pPr indent="0" marL="0">
-              <a:buNone/>
-            </a:pPr>
-            <a:r>
-              <a:rPr lang="en-US" sz="1800" b="1" dirty="0">
-                <a:solidFill>
-                  <a:schemeClr val="tx1"/>
-                </a:solidFill>
-                <a:latin typeface="Courier New" pitchFamily="34" charset="0"/>
-                <a:ea typeface="Courier New" pitchFamily="34" charset="-122"/>
-                <a:cs typeface="Courier New" pitchFamily="34" charset="-120"/>
-              </a:rPr>
-              <a:t>//223.194.101.83/2026_renderfarm/output/내학번/날짜_작업명/이름</a:t>
-            </a:r>
-            <a:endParaRPr lang="en-US" sz="1800" dirty="0"/>
-          </a:p>
-        </p:txBody>
-      </p:sp>
-      <p:sp>
-        <p:nvSpPr>
-          <p:cNvPr id="15" name="warn"/>
+              <a:t>shot01.0001.png        AOV 를 쓰면  &lt;RenderPass&gt;/shot01.0001.png  도 정상</a:t>
+            </a:r>
+            <a:endParaRPr lang="en-US" sz="1500" dirty="0"/>
+          </a:p>
+        </p:txBody>
+      </p:sp>
+      <p:sp>
+        <p:nvSpPr>
+          <p:cNvPr id="17" name="warn"/>
           <p:cNvSpPr/>
           <p:nvPr/>
         </p:nvSpPr>
         <p:spPr>
           <a:xfrm>
-            <a:off x="685800" y="4892040"/>
-            <a:ext cx="10789920" cy="1371600"/>
+            <a:off x="685800" y="5440680"/>
+            <a:ext cx="10789920" cy="868680"/>
           </a:xfrm>
           <a:prstGeom prst="roundRect">
             <a:avLst>
-              <a:gd name="adj" fmla="val 6667"/>
+              <a:gd name="adj" fmla="val 10526"/>
             </a:avLst>
           </a:prstGeom>
           <a:solidFill>
@@ -6318,49 +6393,49 @@
       </p:sp>
       <p:sp>
         <p:nvSpPr>
-          <p:cNvPr id="16" name="Text 14"/>
-          <p:cNvSpPr txBox="1"/>
-          <p:nvPr/>
-        </p:nvSpPr>
-        <p:spPr>
-          <a:xfrm>
-            <a:off x="1143000" y="5029200"/>
-            <a:ext cx="10058400" cy="411480"/>
-          </a:xfrm>
-          <a:prstGeom prst="rect">
-            <a:avLst/>
-          </a:prstGeom>
-          <a:noFill/>
-          <a:ln/>
-        </p:spPr>
-        <p:txBody>
-          <a:bodyPr wrap="square" rtlCol="0" anchor="ctr"/>
-          <a:lstStyle/>
-          <a:p>
-            <a:pPr indent="0" marL="0">
-              <a:buNone/>
-            </a:pPr>
-            <a:r>
-              <a:rPr lang="en-US" sz="1900" b="1" dirty="0">
+          <p:cNvPr id="18" name="Text 16"/>
+          <p:cNvSpPr txBox="1"/>
+          <p:nvPr/>
+        </p:nvSpPr>
+        <p:spPr>
+          <a:xfrm>
+            <a:off x="1143000" y="5532120"/>
+            <a:ext cx="10058400" cy="365760"/>
+          </a:xfrm>
+          <a:prstGeom prst="rect">
+            <a:avLst/>
+          </a:prstGeom>
+          <a:noFill/>
+          <a:ln/>
+        </p:spPr>
+        <p:txBody>
+          <a:bodyPr wrap="square" rtlCol="0" anchor="ctr"/>
+          <a:lstStyle/>
+          <a:p>
+            <a:pPr indent="0" marL="0">
+              <a:buNone/>
+            </a:pPr>
+            <a:r>
+              <a:rPr lang="en-US" sz="1700" b="1" dirty="0">
                 <a:solidFill>
                   <a:srgbClr val="FFFFFF"/>
                 </a:solidFill>
               </a:rPr>
-              <a:t>붙여넣기 전에 칸을 먼저 비우세요 — Ctrl + A → Delete</a:t>
-            </a:r>
-            <a:endParaRPr lang="en-US" sz="1900" dirty="0"/>
-          </a:p>
-        </p:txBody>
-      </p:sp>
-      <p:sp>
-        <p:nvSpPr>
-          <p:cNvPr id="17" name="Text 15"/>
-          <p:cNvSpPr txBox="1"/>
-          <p:nvPr/>
-        </p:nvSpPr>
-        <p:spPr>
-          <a:xfrm>
-            <a:off x="1143000" y="5440680"/>
+              <a:t>양쪽에 다 전체 경로를 넣으면 폴더 안에 폴더가 계속 생깁니다</a:t>
+            </a:r>
+            <a:endParaRPr lang="en-US" sz="1700" dirty="0"/>
+          </a:p>
+        </p:txBody>
+      </p:sp>
+      <p:sp>
+        <p:nvSpPr>
+          <p:cNvPr id="19" name="Text 17"/>
+          <p:cNvSpPr txBox="1"/>
+          <p:nvPr/>
+        </p:nvSpPr>
+        <p:spPr>
+          <a:xfrm>
+            <a:off x="1143000" y="5897880"/>
             <a:ext cx="10058400" cy="365760"/>
           </a:xfrm>
           <a:prstGeom prst="rect">
@@ -6377,50 +6452,17 @@
               <a:buNone/>
             </a:pPr>
             <a:r>
-              <a:rPr lang="en-US" sz="1500" dirty="0">
+              <a:rPr lang="en-US" sz="1300" dirty="0">
                 <a:solidFill>
                   <a:srgbClr val="FFFFFF"/>
                 </a:solidFill>
-              </a:rPr>
-              <a:t>지난 작업 경로가 씬에 저장되어 있습니다. 안 지우고 붙이면 경로가 두 개 이어 붙습니다.</a:t>
-            </a:r>
-            <a:endParaRPr lang="en-US" sz="1500" dirty="0"/>
-          </a:p>
-        </p:txBody>
-      </p:sp>
-      <p:sp>
-        <p:nvSpPr>
-          <p:cNvPr id="18" name="Text 16"/>
-          <p:cNvSpPr txBox="1"/>
-          <p:nvPr/>
-        </p:nvSpPr>
-        <p:spPr>
-          <a:xfrm>
-            <a:off x="1143000" y="5806440"/>
-            <a:ext cx="10058400" cy="365760"/>
-          </a:xfrm>
-          <a:prstGeom prst="rect">
-            <a:avLst/>
-          </a:prstGeom>
-          <a:noFill/>
-          <a:ln/>
-        </p:spPr>
-        <p:txBody>
-          <a:bodyPr wrap="square" rtlCol="0" anchor="ctr"/>
-          <a:lstStyle/>
-          <a:p>
-            <a:pPr indent="0" marL="0">
-              <a:buNone/>
-            </a:pPr>
-            <a:r>
-              <a:rPr lang="en-US" sz="1500" b="1" dirty="0">
-                <a:solidFill>
-                  <a:srgbClr val="FFFFFF"/>
-                </a:solidFill>
-              </a:rPr>
-              <a:t>확인 — 아래 File name: 줄에서  //  가 맨 앞에 한 번만 나오면 맞습니다</a:t>
-            </a:r>
-            <a:endParaRPr lang="en-US" sz="1500" dirty="0"/>
+                <a:latin typeface="Courier New" pitchFamily="34" charset="0"/>
+                <a:ea typeface="Courier New" pitchFamily="34" charset="-122"/>
+                <a:cs typeface="Courier New" pitchFamily="34" charset="-120"/>
+              </a:rPr>
+              <a:t>//...20261103_final / beauty / //223.194.101.83/...20261017_old/bd.0002.png</a:t>
+            </a:r>
+            <a:endParaRPr lang="en-US" sz="1300" dirty="0"/>
           </a:p>
         </p:txBody>
       </p:sp>

--- a/docs/pdf/M211_렌더팜_설명회.pptx
+++ b/docs/pdf/M211_렌더팜_설명회.pptx
@@ -135,20 +135,20 @@
   <p:extLst>
     <p:ext uri="{521415D9-36F7-43E2-AB2F-B90AF26B5E84}">
       <p14:sectionLst xmlns:p14="http://schemas.microsoft.com/office/powerpoint/2010/main">
-        <p14:section name="여는 말" id="{2bd30c2e-203b-f143-03c8-4a7f55e29f36}">
+        <p14:section name="여는 말" id="{bde02108-13be-c54c-9bbc-156eade801fd}">
           <p14:sldIdLst>
             <p14:sldId id="256"/>
             <p14:sldId id="257"/>
           </p14:sldIdLst>
         </p14:section>
-        <p14:section name="렌더팜이란" id="{46d9fbe9-2fbb-ca2b-f29a-999f1d921fcc}">
+        <p14:section name="렌더팜이란" id="{6f4881d3-6caa-7c34-0f7d-c3964c87eec5}">
           <p14:sldIdLst>
             <p14:sldId id="258"/>
             <p14:sldId id="259"/>
             <p14:sldId id="260"/>
           </p14:sldIdLst>
         </p14:section>
-        <p14:section name="예약 규칙" id="{becbb400-6a09-3800-bce5-d875274e1230}">
+        <p14:section name="예약 규칙" id="{fe6d6f1f-3aed-036f-a545-cb3a66a98ca9}">
           <p14:sldIdLst>
             <p14:sldId id="261"/>
             <p14:sldId id="262"/>
@@ -157,7 +157,7 @@
             <p14:sldId id="265"/>
           </p14:sldIdLst>
         </p14:section>
-        <p14:section name="사용법" id="{08b578c3-184f-0e7a-d5fa-6a43b1c3a2d6}">
+        <p14:section name="사용법" id="{3aea200b-925a-aad8-1bd6-d5dd46bace2b}">
           <p14:sldIdLst>
             <p14:sldId id="266"/>
             <p14:sldId id="267"/>
@@ -172,14 +172,14 @@
             <p14:sldId id="276"/>
           </p14:sldIdLst>
         </p14:section>
-        <p14:section name="시연" id="{9b0b34e4-30c7-aaef-edf0-c3224f399283}">
+        <p14:section name="시연" id="{a298506a-6ada-40fe-89a7-c835a2788171}">
           <p14:sldIdLst>
             <p14:sldId id="277"/>
             <p14:sldId id="278"/>
             <p14:sldId id="279"/>
           </p14:sldIdLst>
         </p14:section>
-        <p14:section name="자주 나는 실수" id="{a70a2ed3-5d94-2a1e-6bd4-50a69d814444}">
+        <p14:section name="자주 나는 실수" id="{08a6700c-2bbc-10c2-5d41-11b67417ca11}">
           <p14:sldIdLst>
             <p14:sldId id="280"/>
             <p14:sldId id="281"/>
